--- a/Group D/Joshua Deckman & Jack Pearson/final-project/presentation/presentation-slides.pptx
+++ b/Group D/Joshua Deckman & Jack Pearson/final-project/presentation/presentation-slides.pptx
@@ -125,6 +125,8 @@
 <file path=ppt/revisionInfo.xml><?xml version="1.0" encoding="utf-8"?>
 <p1510:revInfo xmlns:a="http://schemas.openxmlformats.org/drawingml/2006/main" xmlns:r="http://schemas.openxmlformats.org/officeDocument/2006/relationships" xmlns:p1510="http://schemas.microsoft.com/office/powerpoint/2015/10/main">
   <p1510:revLst>
+    <p1510:client id="{229022C8-DE55-F07B-027A-82E3121BA720}" v="1438" dt="2025-12-08T17:41:23.804"/>
+    <p1510:client id="{287E5D8A-8AC6-A2FE-5912-1A5205254A82}" v="525" dt="2025-12-08T18:25:46.615"/>
     <p1510:client id="{B61FC42B-BB3E-4898-9518-3BEB329609D7}" v="34" dt="2025-12-08T09:54:02.438"/>
   </p1510:revLst>
 </p1510:revInfo>
@@ -132,6 +134,38 @@
 
 <file path=ppt/changesInfos/changesInfo1.xml><?xml version="1.0" encoding="utf-8"?>
 <pc:chgInfo xmlns:a="http://schemas.openxmlformats.org/drawingml/2006/main" xmlns:r="http://schemas.openxmlformats.org/officeDocument/2006/relationships" xmlns:ac="http://schemas.microsoft.com/office/drawing/2013/main/command" xmlns:pc="http://schemas.microsoft.com/office/powerpoint/2013/main/command">
+  <pc:docChgLst>
+    <pc:chgData name="Jack Pearson" userId="S::jackpearson@cpp.edu::6ea84130-ad5c-4dce-808e-ddf7a31ad9d2" providerId="AD" clId="Web-{287E5D8A-8AC6-A2FE-5912-1A5205254A82}"/>
+    <pc:docChg chg="modSld">
+      <pc:chgData name="Jack Pearson" userId="S::jackpearson@cpp.edu::6ea84130-ad5c-4dce-808e-ddf7a31ad9d2" providerId="AD" clId="Web-{287E5D8A-8AC6-A2FE-5912-1A5205254A82}" dt="2025-12-08T18:18:12.760" v="508"/>
+      <pc:docMkLst>
+        <pc:docMk/>
+      </pc:docMkLst>
+      <pc:sldChg chg="modSp">
+        <pc:chgData name="Jack Pearson" userId="S::jackpearson@cpp.edu::6ea84130-ad5c-4dce-808e-ddf7a31ad9d2" providerId="AD" clId="Web-{287E5D8A-8AC6-A2FE-5912-1A5205254A82}" dt="2025-12-08T18:18:12.760" v="508"/>
+        <pc:sldMkLst>
+          <pc:docMk/>
+          <pc:sldMk cId="20591388" sldId="263"/>
+        </pc:sldMkLst>
+        <pc:spChg chg="mod">
+          <ac:chgData name="Jack Pearson" userId="S::jackpearson@cpp.edu::6ea84130-ad5c-4dce-808e-ddf7a31ad9d2" providerId="AD" clId="Web-{287E5D8A-8AC6-A2FE-5912-1A5205254A82}" dt="2025-12-08T18:16:13.993" v="489" actId="20577"/>
+          <ac:spMkLst>
+            <pc:docMk/>
+            <pc:sldMk cId="20591388" sldId="263"/>
+            <ac:spMk id="3" creationId="{3E9561EA-CEEF-BB15-6394-399AD1CC0BB4}"/>
+          </ac:spMkLst>
+        </pc:spChg>
+        <pc:graphicFrameChg chg="mod modGraphic">
+          <ac:chgData name="Jack Pearson" userId="S::jackpearson@cpp.edu::6ea84130-ad5c-4dce-808e-ddf7a31ad9d2" providerId="AD" clId="Web-{287E5D8A-8AC6-A2FE-5912-1A5205254A82}" dt="2025-12-08T18:18:12.760" v="508"/>
+          <ac:graphicFrameMkLst>
+            <pc:docMk/>
+            <pc:sldMk cId="20591388" sldId="263"/>
+            <ac:graphicFrameMk id="5" creationId="{E01E1C88-5C3D-8D6B-AA35-654B886B045F}"/>
+          </ac:graphicFrameMkLst>
+        </pc:graphicFrameChg>
+      </pc:sldChg>
+    </pc:docChg>
+  </pc:docChgLst>
   <pc:docChgLst>
     <pc:chgData name="Joshua Z. Deckman" userId="3c66a062-38cd-4e2f-b7de-74744a846df8" providerId="ADAL" clId="{D68B645B-0417-4586-83AA-227A4A209476}"/>
     <pc:docChg chg="undo custSel addSld delSld modSld">
@@ -513,6 +547,122 @@
           <pc:docMk/>
           <pc:sldMk cId="2575098261" sldId="264"/>
         </pc:sldMkLst>
+      </pc:sldChg>
+    </pc:docChg>
+  </pc:docChgLst>
+  <pc:docChgLst>
+    <pc:chgData name="Jack Pearson" userId="S::jackpearson@cpp.edu::6ea84130-ad5c-4dce-808e-ddf7a31ad9d2" providerId="AD" clId="Web-{229022C8-DE55-F07B-027A-82E3121BA720}"/>
+    <pc:docChg chg="modSld">
+      <pc:chgData name="Jack Pearson" userId="S::jackpearson@cpp.edu::6ea84130-ad5c-4dce-808e-ddf7a31ad9d2" providerId="AD" clId="Web-{229022C8-DE55-F07B-027A-82E3121BA720}" dt="2025-12-08T17:41:23.804" v="1061"/>
+      <pc:docMkLst>
+        <pc:docMk/>
+      </pc:docMkLst>
+      <pc:sldChg chg="modSp">
+        <pc:chgData name="Jack Pearson" userId="S::jackpearson@cpp.edu::6ea84130-ad5c-4dce-808e-ddf7a31ad9d2" providerId="AD" clId="Web-{229022C8-DE55-F07B-027A-82E3121BA720}" dt="2025-12-08T17:14:34.717" v="312" actId="20577"/>
+        <pc:sldMkLst>
+          <pc:docMk/>
+          <pc:sldMk cId="2643001977" sldId="257"/>
+        </pc:sldMkLst>
+        <pc:spChg chg="mod">
+          <ac:chgData name="Jack Pearson" userId="S::jackpearson@cpp.edu::6ea84130-ad5c-4dce-808e-ddf7a31ad9d2" providerId="AD" clId="Web-{229022C8-DE55-F07B-027A-82E3121BA720}" dt="2025-12-08T17:14:34.717" v="312" actId="20577"/>
+          <ac:spMkLst>
+            <pc:docMk/>
+            <pc:sldMk cId="2643001977" sldId="257"/>
+            <ac:spMk id="5" creationId="{D887010E-8BCB-2786-8072-C842C81BDD9D}"/>
+          </ac:spMkLst>
+        </pc:spChg>
+      </pc:sldChg>
+      <pc:sldChg chg="modSp">
+        <pc:chgData name="Jack Pearson" userId="S::jackpearson@cpp.edu::6ea84130-ad5c-4dce-808e-ddf7a31ad9d2" providerId="AD" clId="Web-{229022C8-DE55-F07B-027A-82E3121BA720}" dt="2025-12-08T17:15:49.936" v="388" actId="14100"/>
+        <pc:sldMkLst>
+          <pc:docMk/>
+          <pc:sldMk cId="1206507168" sldId="258"/>
+        </pc:sldMkLst>
+        <pc:spChg chg="mod">
+          <ac:chgData name="Jack Pearson" userId="S::jackpearson@cpp.edu::6ea84130-ad5c-4dce-808e-ddf7a31ad9d2" providerId="AD" clId="Web-{229022C8-DE55-F07B-027A-82E3121BA720}" dt="2025-12-08T17:14:59.733" v="325" actId="20577"/>
+          <ac:spMkLst>
+            <pc:docMk/>
+            <pc:sldMk cId="1206507168" sldId="258"/>
+            <ac:spMk id="2" creationId="{6274159F-B344-C1A6-ED1B-ACAE3599A99B}"/>
+          </ac:spMkLst>
+        </pc:spChg>
+        <pc:spChg chg="mod">
+          <ac:chgData name="Jack Pearson" userId="S::jackpearson@cpp.edu::6ea84130-ad5c-4dce-808e-ddf7a31ad9d2" providerId="AD" clId="Web-{229022C8-DE55-F07B-027A-82E3121BA720}" dt="2025-12-08T17:15:49.936" v="388" actId="14100"/>
+          <ac:spMkLst>
+            <pc:docMk/>
+            <pc:sldMk cId="1206507168" sldId="258"/>
+            <ac:spMk id="5" creationId="{B35D2C89-E318-81B8-EF3A-0473A35D0744}"/>
+          </ac:spMkLst>
+        </pc:spChg>
+      </pc:sldChg>
+      <pc:sldChg chg="addSp delSp modSp">
+        <pc:chgData name="Jack Pearson" userId="S::jackpearson@cpp.edu::6ea84130-ad5c-4dce-808e-ddf7a31ad9d2" providerId="AD" clId="Web-{229022C8-DE55-F07B-027A-82E3121BA720}" dt="2025-12-08T17:04:30.623" v="178"/>
+        <pc:sldMkLst>
+          <pc:docMk/>
+          <pc:sldMk cId="3932029323" sldId="260"/>
+        </pc:sldMkLst>
+        <pc:spChg chg="add del">
+          <ac:chgData name="Jack Pearson" userId="S::jackpearson@cpp.edu::6ea84130-ad5c-4dce-808e-ddf7a31ad9d2" providerId="AD" clId="Web-{229022C8-DE55-F07B-027A-82E3121BA720}" dt="2025-12-08T17:04:30.623" v="178"/>
+          <ac:spMkLst>
+            <pc:docMk/>
+            <pc:sldMk cId="3932029323" sldId="260"/>
+            <ac:spMk id="8" creationId="{ACE80B69-3FF4-9A99-E8C0-612B6A6B685B}"/>
+          </ac:spMkLst>
+        </pc:spChg>
+        <pc:cxnChg chg="add del mod">
+          <ac:chgData name="Jack Pearson" userId="S::jackpearson@cpp.edu::6ea84130-ad5c-4dce-808e-ddf7a31ad9d2" providerId="AD" clId="Web-{229022C8-DE55-F07B-027A-82E3121BA720}" dt="2025-12-08T17:04:30.623" v="178"/>
+          <ac:cxnSpMkLst>
+            <pc:docMk/>
+            <pc:sldMk cId="3932029323" sldId="260"/>
+            <ac:cxnSpMk id="15" creationId="{1BBA0859-9CF9-9D49-F4A1-0AAA65B9ED85}"/>
+          </ac:cxnSpMkLst>
+        </pc:cxnChg>
+      </pc:sldChg>
+      <pc:sldChg chg="modSp">
+        <pc:chgData name="Jack Pearson" userId="S::jackpearson@cpp.edu::6ea84130-ad5c-4dce-808e-ddf7a31ad9d2" providerId="AD" clId="Web-{229022C8-DE55-F07B-027A-82E3121BA720}" dt="2025-12-08T17:04:13.967" v="174" actId="20577"/>
+        <pc:sldMkLst>
+          <pc:docMk/>
+          <pc:sldMk cId="776718564" sldId="262"/>
+        </pc:sldMkLst>
+        <pc:spChg chg="mod">
+          <ac:chgData name="Jack Pearson" userId="S::jackpearson@cpp.edu::6ea84130-ad5c-4dce-808e-ddf7a31ad9d2" providerId="AD" clId="Web-{229022C8-DE55-F07B-027A-82E3121BA720}" dt="2025-12-08T17:04:13.967" v="174" actId="20577"/>
+          <ac:spMkLst>
+            <pc:docMk/>
+            <pc:sldMk cId="776718564" sldId="262"/>
+            <ac:spMk id="6" creationId="{010BC3D6-47D3-B25B-EDB5-98E31922CBB2}"/>
+          </ac:spMkLst>
+        </pc:spChg>
+      </pc:sldChg>
+      <pc:sldChg chg="addSp modSp">
+        <pc:chgData name="Jack Pearson" userId="S::jackpearson@cpp.edu::6ea84130-ad5c-4dce-808e-ddf7a31ad9d2" providerId="AD" clId="Web-{229022C8-DE55-F07B-027A-82E3121BA720}" dt="2025-12-08T17:41:23.804" v="1061"/>
+        <pc:sldMkLst>
+          <pc:docMk/>
+          <pc:sldMk cId="20591388" sldId="263"/>
+        </pc:sldMkLst>
+        <pc:spChg chg="mod">
+          <ac:chgData name="Jack Pearson" userId="S::jackpearson@cpp.edu::6ea84130-ad5c-4dce-808e-ddf7a31ad9d2" providerId="AD" clId="Web-{229022C8-DE55-F07B-027A-82E3121BA720}" dt="2025-12-08T17:18:30.922" v="450" actId="20577"/>
+          <ac:spMkLst>
+            <pc:docMk/>
+            <pc:sldMk cId="20591388" sldId="263"/>
+            <ac:spMk id="2" creationId="{5A3C3A52-07C6-E0F9-5A97-BD395575E053}"/>
+          </ac:spMkLst>
+        </pc:spChg>
+        <pc:spChg chg="mod">
+          <ac:chgData name="Jack Pearson" userId="S::jackpearson@cpp.edu::6ea84130-ad5c-4dce-808e-ddf7a31ad9d2" providerId="AD" clId="Web-{229022C8-DE55-F07B-027A-82E3121BA720}" dt="2025-12-08T17:19:47.250" v="456" actId="20577"/>
+          <ac:spMkLst>
+            <pc:docMk/>
+            <pc:sldMk cId="20591388" sldId="263"/>
+            <ac:spMk id="3" creationId="{3E9561EA-CEEF-BB15-6394-399AD1CC0BB4}"/>
+          </ac:spMkLst>
+        </pc:spChg>
+        <pc:graphicFrameChg chg="add mod modGraphic">
+          <ac:chgData name="Jack Pearson" userId="S::jackpearson@cpp.edu::6ea84130-ad5c-4dce-808e-ddf7a31ad9d2" providerId="AD" clId="Web-{229022C8-DE55-F07B-027A-82E3121BA720}" dt="2025-12-08T17:41:23.804" v="1061"/>
+          <ac:graphicFrameMkLst>
+            <pc:docMk/>
+            <pc:sldMk cId="20591388" sldId="263"/>
+            <ac:graphicFrameMk id="5" creationId="{E01E1C88-5C3D-8D6B-AA35-654B886B045F}"/>
+          </ac:graphicFrameMkLst>
+        </pc:graphicFrameChg>
       </pc:sldChg>
     </pc:docChg>
   </pc:docChgLst>
@@ -7753,7 +7903,7 @@
         <p:spPr>
           <a:xfrm>
             <a:off x="764345" y="1988233"/>
-            <a:ext cx="5040924" cy="3416320"/>
+            <a:ext cx="5040924" cy="4154984"/>
           </a:xfrm>
           <a:prstGeom prst="rect">
             <a:avLst/>
@@ -7761,7 +7911,7 @@
           <a:noFill/>
         </p:spPr>
         <p:txBody>
-          <a:bodyPr wrap="square" rtlCol="0">
+          <a:bodyPr wrap="square" lIns="91440" tIns="45720" rIns="91440" bIns="45720" rtlCol="0" anchor="t">
             <a:spAutoFit/>
           </a:bodyPr>
           <a:lstStyle/>
@@ -7772,15 +7922,8 @@
             </a:pPr>
             <a:r>
               <a:rPr lang="en-US" sz="2400" dirty="0"/>
-              <a:t>Kyber is a PQC approach to asymmetric encryption</a:t>
+              <a:t>Report where the post-quantum transition will be costly vs cheap</a:t>
             </a:r>
-          </a:p>
-          <a:p>
-            <a:pPr marL="285750" indent="-285750">
-              <a:buFont typeface="Arial" panose="020B0604020202020204" pitchFamily="34" charset="0"/>
-              <a:buChar char="•"/>
-            </a:pPr>
-            <a:endParaRPr lang="en-US" sz="2400" dirty="0"/>
           </a:p>
           <a:p>
             <a:pPr marL="285750" indent="-285750">
@@ -7789,15 +7932,18 @@
             </a:pPr>
             <a:r>
               <a:rPr lang="en-US" sz="2400" dirty="0"/>
-              <a:t>Goal: benchmark Kyber and ECC Diffie-Hellman</a:t>
+              <a:t>Compare Diffie-Hellman (pre-quantum) and Kyber (post-quantum)</a:t>
             </a:r>
           </a:p>
           <a:p>
-            <a:pPr marL="285750" indent="-285750">
-              <a:buFont typeface="Arial" panose="020B0604020202020204" pitchFamily="34" charset="0"/>
-              <a:buChar char="•"/>
+            <a:pPr marL="742950" lvl="1" indent="-285750">
+              <a:buFont typeface="Courier New" panose="020B0604020202020204" pitchFamily="34" charset="0"/>
+              <a:buChar char="o"/>
             </a:pPr>
-            <a:endParaRPr lang="en-US" sz="2400" dirty="0"/>
+            <a:r>
+              <a:rPr lang="en-US" sz="2400" dirty="0"/>
+              <a:t>Sensitivity to adverse network conditions</a:t>
+            </a:r>
           </a:p>
           <a:p>
             <a:pPr marL="285750" indent="-285750">
@@ -7806,15 +7952,8 @@
             </a:pPr>
             <a:r>
               <a:rPr lang="en-US" sz="2400" dirty="0"/>
-              <a:t>Anticipation: Kyber is heavier</a:t>
+              <a:t>Anticipation: Kyber much more sensitive to bandwidth, similar sensitivity to delay</a:t>
             </a:r>
-          </a:p>
-          <a:p>
-            <a:pPr marL="285750" indent="-285750">
-              <a:buFont typeface="Arial" panose="020B0604020202020204" pitchFamily="34" charset="0"/>
-              <a:buChar char="•"/>
-            </a:pPr>
-            <a:endParaRPr lang="en-US" sz="2400" dirty="0"/>
           </a:p>
           <a:p>
             <a:pPr marL="285750" indent="-285750">
@@ -8385,6 +8524,7 @@
             </a:extLst>
           </p:cNvPr>
           <p:cNvCxnSpPr>
+            <a:cxnSpLocks/>
             <a:stCxn id="9" idx="3"/>
             <a:endCxn id="8" idx="1"/>
           </p:cNvCxnSpPr>
@@ -14873,8 +15013,8 @@
         </p:nvSpPr>
         <p:spPr>
           <a:xfrm>
-            <a:off x="2329869" y="1502350"/>
-            <a:ext cx="4260846" cy="646331"/>
+            <a:off x="1401182" y="1335663"/>
+            <a:ext cx="5386079" cy="1200329"/>
           </a:xfrm>
           <a:prstGeom prst="rect">
             <a:avLst/>
@@ -14882,7 +15022,7 @@
           <a:noFill/>
         </p:spPr>
         <p:txBody>
-          <a:bodyPr wrap="none" rtlCol="0">
+          <a:bodyPr wrap="square" lIns="91440" tIns="45720" rIns="91440" bIns="45720" rtlCol="0" anchor="t">
             <a:spAutoFit/>
           </a:bodyPr>
           <a:lstStyle/>
@@ -14905,6 +15045,27 @@
               <a:rPr lang="en-US" dirty="0"/>
               <a:t>Directly proportional to delay (latency)</a:t>
             </a:r>
+          </a:p>
+          <a:p>
+            <a:pPr marL="285750" indent="-285750">
+              <a:buFont typeface="Arial" panose="020B0604020202020204" pitchFamily="34" charset="0"/>
+              <a:buChar char="•"/>
+            </a:pPr>
+            <a:r>
+              <a:rPr lang="en-US" dirty="0"/>
+              <a:t>Similar response when latency-limited</a:t>
+            </a:r>
+          </a:p>
+          <a:p>
+            <a:pPr marL="742950" lvl="1" indent="-285750">
+              <a:buFont typeface="Courier New" panose="020B0604020202020204" pitchFamily="34" charset="0"/>
+              <a:buChar char="o"/>
+            </a:pPr>
+            <a:r>
+              <a:rPr lang="en-US" dirty="0"/>
+              <a:t>Bandwidth is the interesting variable</a:t>
+            </a:r>
+            <a:endParaRPr lang="en-US"/>
           </a:p>
         </p:txBody>
       </p:sp>
@@ -15028,7 +15189,7 @@
           <a:p>
             <a:r>
               <a:rPr lang="en-US" dirty="0"/>
-              <a:t>Difference and Ratio Comparison</a:t>
+              <a:t>Network Rate Analysis</a:t>
             </a:r>
           </a:p>
         </p:txBody>
@@ -15047,8 +15208,8 @@
         </p:nvSpPr>
         <p:spPr>
           <a:xfrm>
-            <a:off x="777392" y="2465315"/>
-            <a:ext cx="4990790" cy="923330"/>
+            <a:off x="808179" y="2465315"/>
+            <a:ext cx="5730807" cy="1754326"/>
           </a:xfrm>
           <a:prstGeom prst="rect">
             <a:avLst/>
@@ -15056,7 +15217,7 @@
           <a:noFill/>
         </p:spPr>
         <p:txBody>
-          <a:bodyPr wrap="none" rtlCol="0">
+          <a:bodyPr wrap="square" lIns="91440" tIns="45720" rIns="91440" bIns="45720" rtlCol="0" anchor="t">
             <a:spAutoFit/>
           </a:bodyPr>
           <a:lstStyle/>
@@ -15067,7 +15228,7 @@
             </a:pPr>
             <a:r>
               <a:rPr lang="en-US" dirty="0"/>
-              <a:t>Radio mostly independent from rate</a:t>
+              <a:t>Ratio between Diffie-Hellman and Kyber key exchange time is mostly independent from network rate</a:t>
             </a:r>
           </a:p>
           <a:p>
@@ -15077,7 +15238,7 @@
             </a:pPr>
             <a:r>
               <a:rPr lang="en-US" dirty="0"/>
-              <a:t>Approximately 3.8x more processing for Kyber</a:t>
+              <a:t>Approximately 3.8x more data needed for Kyber</a:t>
             </a:r>
           </a:p>
           <a:p>
@@ -15090,9 +15251,16 @@
               <a:t>At 550 kbps, the difference is about 22 </a:t>
             </a:r>
             <a:r>
-              <a:rPr lang="en-US" dirty="0" err="1"/>
+              <a:rPr lang="en-US" err="1"/>
               <a:t>ms.</a:t>
             </a:r>
+            <a:endParaRPr lang="en-US"/>
+          </a:p>
+          <a:p>
+            <a:pPr marL="285750" indent="-285750">
+              <a:buFont typeface="Arial" panose="020B0604020202020204" pitchFamily="34" charset="0"/>
+              <a:buChar char="•"/>
+            </a:pPr>
             <a:endParaRPr lang="en-US" dirty="0"/>
           </a:p>
         </p:txBody>
@@ -15180,7 +15348,7 @@
           <a:p>
             <a:r>
               <a:rPr lang="en-US" dirty="0"/>
-              <a:t>Is It Warranted?</a:t>
+              <a:t>Where does it matter?</a:t>
             </a:r>
           </a:p>
         </p:txBody>
@@ -15203,42 +15371,15 @@
         </p:nvSpPr>
         <p:spPr/>
         <p:txBody>
-          <a:bodyPr/>
+          <a:bodyPr vert="horz" lIns="91440" tIns="45720" rIns="91440" bIns="45720" rtlCol="0" anchor="t">
+            <a:normAutofit/>
+          </a:bodyPr>
           <a:lstStyle/>
-          <a:p>
-            <a:r>
-              <a:rPr lang="en-US" dirty="0"/>
-              <a:t>Asymmetric encryption used for key exchange</a:t>
-            </a:r>
-          </a:p>
-          <a:p>
-            <a:r>
-              <a:rPr lang="en-US" dirty="0"/>
-              <a:t>Far less frequent than symmetric encryption</a:t>
-            </a:r>
-          </a:p>
-          <a:p>
-            <a:endParaRPr lang="en-US" dirty="0"/>
-          </a:p>
-          <a:p>
-            <a:endParaRPr lang="en-US" dirty="0"/>
-          </a:p>
           <a:p>
             <a:pPr marL="0" indent="0">
               <a:buNone/>
             </a:pPr>
-            <a:r>
-              <a:rPr lang="en-US" u="sng" dirty="0"/>
-              <a:t>For defense against quantum attacks, 22 </a:t>
-            </a:r>
-            <a:r>
-              <a:rPr lang="en-US" u="sng" dirty="0" err="1"/>
-              <a:t>ms</a:t>
-            </a:r>
-            <a:r>
-              <a:rPr lang="en-US" u="sng" dirty="0"/>
-              <a:t> is probably worth it.</a:t>
-            </a:r>
+            <a:endParaRPr lang="en-US" dirty="0"/>
           </a:p>
         </p:txBody>
       </p:sp>
@@ -15277,6 +15418,314 @@
           </a:p>
         </p:txBody>
       </p:sp>
+      <p:graphicFrame>
+        <p:nvGraphicFramePr>
+          <p:cNvPr id="5" name="Table 4">
+            <a:extLst>
+              <a:ext uri="{FF2B5EF4-FFF2-40B4-BE49-F238E27FC236}">
+                <a16:creationId xmlns:a16="http://schemas.microsoft.com/office/drawing/2014/main" id="{E01E1C88-5C3D-8D6B-AA35-654B886B045F}"/>
+              </a:ext>
+            </a:extLst>
+          </p:cNvPr>
+          <p:cNvGraphicFramePr>
+            <a:graphicFrameLocks noGrp="1"/>
+          </p:cNvGraphicFramePr>
+          <p:nvPr>
+            <p:extLst>
+              <p:ext uri="{D42A27DB-BD31-4B8C-83A1-F6EECF244321}">
+                <p14:modId xmlns:p14="http://schemas.microsoft.com/office/powerpoint/2010/main" val="2545050020"/>
+              </p:ext>
+            </p:extLst>
+          </p:nvPr>
+        </p:nvGraphicFramePr>
+        <p:xfrm>
+          <a:off x="995680" y="2585043"/>
+          <a:ext cx="9985137" cy="2834640"/>
+        </p:xfrm>
+        <a:graphic>
+          <a:graphicData uri="http://schemas.openxmlformats.org/drawingml/2006/table">
+            <a:tbl>
+              <a:tblPr firstRow="1" bandRow="1">
+                <a:tableStyleId>{5C22544A-7EE6-4342-B048-85BDC9FD1C3A}</a:tableStyleId>
+              </a:tblPr>
+              <a:tblGrid>
+                <a:gridCol w="1985818">
+                  <a:extLst>
+                    <a:ext uri="{9D8B030D-6E8A-4147-A177-3AD203B41FA5}">
+                      <a16:colId xmlns:a16="http://schemas.microsoft.com/office/drawing/2014/main" val="927354193"/>
+                    </a:ext>
+                  </a:extLst>
+                </a:gridCol>
+                <a:gridCol w="2647754">
+                  <a:extLst>
+                    <a:ext uri="{9D8B030D-6E8A-4147-A177-3AD203B41FA5}">
+                      <a16:colId xmlns:a16="http://schemas.microsoft.com/office/drawing/2014/main" val="1907031534"/>
+                    </a:ext>
+                  </a:extLst>
+                </a:gridCol>
+                <a:gridCol w="5351565">
+                  <a:extLst>
+                    <a:ext uri="{9D8B030D-6E8A-4147-A177-3AD203B41FA5}">
+                      <a16:colId xmlns:a16="http://schemas.microsoft.com/office/drawing/2014/main" val="2860855252"/>
+                    </a:ext>
+                  </a:extLst>
+                </a:gridCol>
+              </a:tblGrid>
+              <a:tr h="370840">
+                <a:tc>
+                  <a:txBody>
+                    <a:bodyPr/>
+                    <a:lstStyle/>
+                    <a:p>
+                      <a:r>
+                        <a:rPr lang="en-US" dirty="0"/>
+                        <a:t>Domain</a:t>
+                      </a:r>
+                    </a:p>
+                  </a:txBody>
+                  <a:tcPr/>
+                </a:tc>
+                <a:tc>
+                  <a:txBody>
+                    <a:bodyPr/>
+                    <a:lstStyle/>
+                    <a:p>
+                      <a:r>
+                        <a:rPr lang="en-US" dirty="0"/>
+                        <a:t>Network Characteristics</a:t>
+                      </a:r>
+                    </a:p>
+                  </a:txBody>
+                  <a:tcPr/>
+                </a:tc>
+                <a:tc>
+                  <a:txBody>
+                    <a:bodyPr/>
+                    <a:lstStyle/>
+                    <a:p>
+                      <a:pPr lvl="0">
+                        <a:buNone/>
+                      </a:pPr>
+                      <a:r>
+                        <a:rPr lang="en-US" dirty="0"/>
+                        <a:t>Evaluation</a:t>
+                      </a:r>
+                    </a:p>
+                  </a:txBody>
+                  <a:tcPr/>
+                </a:tc>
+                <a:extLst>
+                  <a:ext uri="{0D108BD9-81ED-4DB2-BD59-A6C34878D82A}">
+                    <a16:rowId xmlns:a16="http://schemas.microsoft.com/office/drawing/2014/main" val="1643350959"/>
+                  </a:ext>
+                </a:extLst>
+              </a:tr>
+              <a:tr h="370840">
+                <a:tc>
+                  <a:txBody>
+                    <a:bodyPr/>
+                    <a:lstStyle/>
+                    <a:p>
+                      <a:r>
+                        <a:rPr lang="en-US" dirty="0"/>
+                        <a:t>GSO Satellite</a:t>
+                      </a:r>
+                    </a:p>
+                  </a:txBody>
+                  <a:tcPr/>
+                </a:tc>
+                <a:tc>
+                  <a:txBody>
+                    <a:bodyPr/>
+                    <a:lstStyle/>
+                    <a:p>
+                      <a:r>
+                        <a:rPr lang="en-US" dirty="0"/>
+                        <a:t>10kbit—220mbit, 500ms</a:t>
+                      </a:r>
+                      <a:r>
+                        <a:rPr lang="en-US" sz="1800" b="0" i="0" u="none" strike="noStrike" noProof="0" dirty="0">
+                          <a:solidFill>
+                            <a:srgbClr val="000000"/>
+                          </a:solidFill>
+                          <a:latin typeface="Aptos"/>
+                        </a:rPr>
+                        <a:t> delay</a:t>
+                      </a:r>
+                      <a:endParaRPr lang="en-US" dirty="0"/>
+                    </a:p>
+                  </a:txBody>
+                  <a:tcPr/>
+                </a:tc>
+                <a:tc>
+                  <a:txBody>
+                    <a:bodyPr/>
+                    <a:lstStyle/>
+                    <a:p>
+                      <a:pPr lvl="0">
+                        <a:buNone/>
+                      </a:pPr>
+                      <a:r>
+                        <a:rPr lang="en-US" dirty="0"/>
+                        <a:t>No difference at 8mbit (2s), small difference at 10kbit: ~2.4s vs ~3.5s. PQ transition is cheap</a:t>
+                      </a:r>
+                    </a:p>
+                  </a:txBody>
+                  <a:tcPr/>
+                </a:tc>
+                <a:extLst>
+                  <a:ext uri="{0D108BD9-81ED-4DB2-BD59-A6C34878D82A}">
+                    <a16:rowId xmlns:a16="http://schemas.microsoft.com/office/drawing/2014/main" val="3459350771"/>
+                  </a:ext>
+                </a:extLst>
+              </a:tr>
+              <a:tr h="370840">
+                <a:tc>
+                  <a:txBody>
+                    <a:bodyPr/>
+                    <a:lstStyle/>
+                    <a:p>
+                      <a:pPr lvl="0">
+                        <a:buNone/>
+                      </a:pPr>
+                      <a:r>
+                        <a:rPr lang="en-US" dirty="0"/>
+                        <a:t>Zigbee (IoT)</a:t>
+                      </a:r>
+                    </a:p>
+                  </a:txBody>
+                  <a:tcPr/>
+                </a:tc>
+                <a:tc>
+                  <a:txBody>
+                    <a:bodyPr/>
+                    <a:lstStyle/>
+                    <a:p>
+                      <a:r>
+                        <a:rPr lang="en-US" dirty="0"/>
+                        <a:t>1kbit—250kbit, 1ms delay</a:t>
+                      </a:r>
+                    </a:p>
+                  </a:txBody>
+                  <a:tcPr/>
+                </a:tc>
+                <a:tc>
+                  <a:txBody>
+                    <a:bodyPr/>
+                    <a:lstStyle/>
+                    <a:p>
+                      <a:pPr lvl="0">
+                        <a:buNone/>
+                      </a:pPr>
+                      <a:r>
+                        <a:rPr lang="en-US" dirty="0"/>
+                        <a:t>2kbit: 3.7s vs 9.5s; 20kbit: 242ms vs 823ms; 200kbit: 25ms vs 83 </a:t>
+                      </a:r>
+                      <a:r>
+                        <a:rPr lang="en-US" dirty="0" err="1"/>
+                        <a:t>ms.</a:t>
+                      </a:r>
+                      <a:r>
+                        <a:rPr lang="en-US" dirty="0"/>
+                        <a:t> PQ transition is expensive</a:t>
+                      </a:r>
+                    </a:p>
+                  </a:txBody>
+                  <a:tcPr/>
+                </a:tc>
+                <a:extLst>
+                  <a:ext uri="{0D108BD9-81ED-4DB2-BD59-A6C34878D82A}">
+                    <a16:rowId xmlns:a16="http://schemas.microsoft.com/office/drawing/2014/main" val="2568566027"/>
+                  </a:ext>
+                </a:extLst>
+              </a:tr>
+              <a:tr h="370840">
+                <a:tc>
+                  <a:txBody>
+                    <a:bodyPr/>
+                    <a:lstStyle/>
+                    <a:p>
+                      <a:pPr lvl="0">
+                        <a:buNone/>
+                      </a:pPr>
+                      <a:r>
+                        <a:rPr lang="en-US" sz="1800" b="0" i="0" u="none" strike="noStrike" noProof="0" dirty="0">
+                          <a:solidFill>
+                            <a:srgbClr val="000000"/>
+                          </a:solidFill>
+                          <a:latin typeface="Aptos"/>
+                        </a:rPr>
+                        <a:t>Internet</a:t>
+                      </a:r>
+                    </a:p>
+                  </a:txBody>
+                  <a:tcPr/>
+                </a:tc>
+                <a:tc>
+                  <a:txBody>
+                    <a:bodyPr/>
+                    <a:lstStyle/>
+                    <a:p>
+                      <a:r>
+                        <a:rPr lang="en-US" dirty="0"/>
+                        <a:t>512kbit—1gbit, 10-150ms delay</a:t>
+                      </a:r>
+                      <a:endParaRPr lang="en-US"/>
+                    </a:p>
+                  </a:txBody>
+                  <a:tcPr/>
+                </a:tc>
+                <a:tc>
+                  <a:txBody>
+                    <a:bodyPr/>
+                    <a:lstStyle/>
+                    <a:p>
+                      <a:pPr lvl="0">
+                        <a:buNone/>
+                      </a:pPr>
+                      <a:r>
+                        <a:rPr lang="en-US" dirty="0"/>
+                        <a:t>3G (512kbit, 150ms): 609ms vs 633 </a:t>
+                      </a:r>
+                      <a:r>
+                        <a:rPr lang="en-US" err="1"/>
+                        <a:t>ms</a:t>
+                      </a:r>
+                      <a:r>
+                        <a:rPr lang="en-US" dirty="0"/>
+                        <a:t>; Gigabit ethernet (1gbit, 10ms) 41 </a:t>
+                      </a:r>
+                      <a:r>
+                        <a:rPr lang="en-US" err="1"/>
+                        <a:t>ms</a:t>
+                      </a:r>
+                      <a:r>
+                        <a:rPr lang="en-US" dirty="0"/>
+                        <a:t> vs 43 </a:t>
+                      </a:r>
+                      <a:r>
+                        <a:rPr lang="en-US" err="1"/>
+                        <a:t>ms.</a:t>
+                      </a:r>
+                      <a:r>
+                        <a:rPr lang="en-US" dirty="0"/>
+                        <a:t> PQ transition is cheap</a:t>
+                      </a:r>
+                      <a:endParaRPr lang="en-US"/>
+                    </a:p>
+                  </a:txBody>
+                  <a:tcPr/>
+                </a:tc>
+                <a:extLst>
+                  <a:ext uri="{0D108BD9-81ED-4DB2-BD59-A6C34878D82A}">
+                    <a16:rowId xmlns:a16="http://schemas.microsoft.com/office/drawing/2014/main" val="1286218257"/>
+                  </a:ext>
+                </a:extLst>
+              </a:tr>
+            </a:tbl>
+          </a:graphicData>
+        </a:graphic>
+      </p:graphicFrame>
     </p:spTree>
     <p:extLst>
       <p:ext uri="{BB962C8B-B14F-4D97-AF65-F5344CB8AC3E}">
